--- a/slides/강화학습_ch2_마르코프결정과정.pptx
+++ b/slides/강화학습_ch2_마르코프결정과정.pptx
@@ -220,7 +220,7 @@
           <a:p>
             <a:fld id="{A6504E4A-07F7-4F02-B3E2-C3B5C1401BF2}" type="datetimeFigureOut">
               <a:rPr lang="ko-KR" altLang="en-US" smtClean="0"/>
-              <a:t>2026-09-11</a:t>
+              <a:t>2026-09-14</a:t>
             </a:fld>
             <a:endParaRPr lang="ko-KR" altLang="en-US"/>
           </a:p>
@@ -708,7 +708,7 @@
           <a:p>
             <a:fld id="{6FFC52B8-7F35-474C-84E9-53F8FF3197BA}" type="datetime1">
               <a:rPr lang="ko-KR" altLang="en-US" smtClean="0"/>
-              <a:t>2026-09-11</a:t>
+              <a:t>2026-09-14</a:t>
             </a:fld>
             <a:endParaRPr lang="ko-KR" altLang="en-US"/>
           </a:p>
@@ -878,7 +878,7 @@
           <a:p>
             <a:fld id="{16CD45D1-34F0-40BF-8F53-7948A1A188B7}" type="datetime1">
               <a:rPr lang="ko-KR" altLang="en-US" smtClean="0"/>
-              <a:t>2026-09-11</a:t>
+              <a:t>2026-09-14</a:t>
             </a:fld>
             <a:endParaRPr lang="ko-KR" altLang="en-US"/>
           </a:p>
@@ -1058,7 +1058,7 @@
           <a:p>
             <a:fld id="{EEF72575-9C60-45F5-B34E-AC321E4EFEC1}" type="datetime1">
               <a:rPr lang="ko-KR" altLang="en-US" smtClean="0"/>
-              <a:t>2026-09-11</a:t>
+              <a:t>2026-09-14</a:t>
             </a:fld>
             <a:endParaRPr lang="ko-KR" altLang="en-US"/>
           </a:p>
@@ -1298,7 +1298,7 @@
           <a:p>
             <a:fld id="{2F814AE1-3117-4EE0-A069-AF58D79E97B0}" type="datetime1">
               <a:rPr lang="ko-KR" altLang="en-US" smtClean="0"/>
-              <a:t>2026-09-11</a:t>
+              <a:t>2026-09-14</a:t>
             </a:fld>
             <a:endParaRPr lang="en-US" altLang="ko-KR"/>
           </a:p>
@@ -1558,7 +1558,7 @@
           <a:p>
             <a:fld id="{4841A3A7-1844-4861-8A25-948A63554618}" type="datetime1">
               <a:rPr lang="ko-KR" altLang="en-US" smtClean="0"/>
-              <a:t>2026-09-11</a:t>
+              <a:t>2026-09-14</a:t>
             </a:fld>
             <a:endParaRPr lang="en-US" altLang="ko-KR"/>
           </a:p>
@@ -1787,7 +1787,7 @@
           <a:p>
             <a:fld id="{5F7E93FD-76F7-4014-9EF6-7780B36380F8}" type="datetime1">
               <a:rPr lang="ko-KR" altLang="en-US" smtClean="0"/>
-              <a:t>2026-09-11</a:t>
+              <a:t>2026-09-14</a:t>
             </a:fld>
             <a:endParaRPr lang="en-US" altLang="ko-KR"/>
           </a:p>
@@ -2047,7 +2047,7 @@
           <a:p>
             <a:fld id="{7363D1D4-B057-4AAA-9672-CCE53A692238}" type="datetime1">
               <a:rPr lang="ko-KR" altLang="en-US" smtClean="0"/>
-              <a:t>2026-09-11</a:t>
+              <a:t>2026-09-14</a:t>
             </a:fld>
             <a:endParaRPr lang="en-US" altLang="ko-KR"/>
           </a:p>
@@ -2290,7 +2290,7 @@
           <a:p>
             <a:fld id="{1A785F0D-20DD-4273-B9CA-041260E6C442}" type="datetime1">
               <a:rPr lang="ko-KR" altLang="en-US" smtClean="0"/>
-              <a:t>2026-09-11</a:t>
+              <a:t>2026-09-14</a:t>
             </a:fld>
             <a:endParaRPr lang="ko-KR" altLang="en-US"/>
           </a:p>
@@ -2550,7 +2550,7 @@
           <a:p>
             <a:fld id="{1012B87E-A7EF-4ACA-9BDB-5D9094BF3EFF}" type="datetime1">
               <a:rPr lang="ko-KR" altLang="en-US" smtClean="0"/>
-              <a:t>2026-09-11</a:t>
+              <a:t>2026-09-14</a:t>
             </a:fld>
             <a:endParaRPr lang="ko-KR" altLang="en-US"/>
           </a:p>
@@ -2782,7 +2782,7 @@
           <a:p>
             <a:fld id="{680A5EAE-8CF8-47D1-8180-E1B5000A314B}" type="datetime1">
               <a:rPr lang="ko-KR" altLang="en-US" smtClean="0"/>
-              <a:t>2026-09-11</a:t>
+              <a:t>2026-09-14</a:t>
             </a:fld>
             <a:endParaRPr lang="ko-KR" altLang="en-US"/>
           </a:p>
@@ -3149,7 +3149,7 @@
           <a:p>
             <a:fld id="{CD8F8A37-152F-4C96-9DE6-4708DE41A156}" type="datetime1">
               <a:rPr lang="ko-KR" altLang="en-US" smtClean="0"/>
-              <a:t>2026-09-11</a:t>
+              <a:t>2026-09-14</a:t>
             </a:fld>
             <a:endParaRPr lang="ko-KR" altLang="en-US"/>
           </a:p>
@@ -3267,7 +3267,7 @@
           <a:p>
             <a:fld id="{E2941E15-0549-493B-9DD1-CC25D7B85CDA}" type="datetime1">
               <a:rPr lang="ko-KR" altLang="en-US" smtClean="0"/>
-              <a:t>2026-09-11</a:t>
+              <a:t>2026-09-14</a:t>
             </a:fld>
             <a:endParaRPr lang="ko-KR" altLang="en-US"/>
           </a:p>
@@ -3362,7 +3362,7 @@
           <a:p>
             <a:fld id="{7F61D7B3-1556-4E73-A55D-61EE568CD906}" type="datetime1">
               <a:rPr lang="ko-KR" altLang="en-US" smtClean="0"/>
-              <a:t>2026-09-11</a:t>
+              <a:t>2026-09-14</a:t>
             </a:fld>
             <a:endParaRPr lang="ko-KR" altLang="en-US"/>
           </a:p>
@@ -3639,7 +3639,7 @@
           <a:p>
             <a:fld id="{DFA10A5E-E5EA-48C2-B8E9-7C3EB5E6F552}" type="datetime1">
               <a:rPr lang="ko-KR" altLang="en-US" smtClean="0"/>
-              <a:t>2026-09-11</a:t>
+              <a:t>2026-09-14</a:t>
             </a:fld>
             <a:endParaRPr lang="ko-KR" altLang="en-US"/>
           </a:p>
@@ -3896,7 +3896,7 @@
           <a:p>
             <a:fld id="{69C2F73C-E35C-485D-8DBB-9E618EDD052C}" type="datetime1">
               <a:rPr lang="ko-KR" altLang="en-US" smtClean="0"/>
-              <a:t>2026-09-11</a:t>
+              <a:t>2026-09-14</a:t>
             </a:fld>
             <a:endParaRPr lang="ko-KR" altLang="en-US"/>
           </a:p>
@@ -4109,7 +4109,7 @@
           <a:p>
             <a:fld id="{71F3065C-782C-4112-9CED-1FE7AAC3A4D5}" type="datetime1">
               <a:rPr lang="ko-KR" altLang="en-US" smtClean="0"/>
-              <a:t>2026-09-11</a:t>
+              <a:t>2026-09-14</a:t>
             </a:fld>
             <a:endParaRPr lang="ko-KR" altLang="en-US"/>
           </a:p>
@@ -4650,8 +4650,8 @@
           </a:p>
         </p:txBody>
       </p:sp>
-      <mc:AlternateContent xmlns:mc="http://schemas.openxmlformats.org/markup-compatibility/2006">
-        <mc:Choice xmlns:a14="http://schemas.microsoft.com/office/drawing/2010/main" Requires="a14">
+      <mc:AlternateContent xmlns:mc="http://schemas.openxmlformats.org/markup-compatibility/2006" xmlns:a14="http://schemas.microsoft.com/office/drawing/2010/main">
+        <mc:Choice Requires="a14">
           <p:sp>
             <p:nvSpPr>
               <p:cNvPr id="3" name="내용 개체 틀 2">
@@ -4822,7 +4822,7 @@
             </p:txBody>
           </p:sp>
         </mc:Choice>
-        <mc:Fallback>
+        <mc:Fallback xmlns="">
           <p:sp>
             <p:nvSpPr>
               <p:cNvPr id="3" name="내용 개체 틀 2">
@@ -4891,8 +4891,8 @@
           </a:p>
         </p:txBody>
       </p:sp>
-      <mc:AlternateContent xmlns:mc="http://schemas.openxmlformats.org/markup-compatibility/2006">
-        <mc:Choice xmlns:a14="http://schemas.microsoft.com/office/drawing/2010/main" Requires="a14">
+      <mc:AlternateContent xmlns:mc="http://schemas.openxmlformats.org/markup-compatibility/2006" xmlns:a14="http://schemas.microsoft.com/office/drawing/2010/main">
+        <mc:Choice Requires="a14">
           <p:sp>
             <p:nvSpPr>
               <p:cNvPr id="6" name="TextBox 5">
@@ -4987,7 +4987,7 @@
             </p:txBody>
           </p:sp>
         </mc:Choice>
-        <mc:Fallback>
+        <mc:Fallback xmlns="">
           <p:sp>
             <p:nvSpPr>
               <p:cNvPr id="6" name="TextBox 5">
@@ -5261,8 +5261,8 @@
           </a:prstGeom>
         </p:spPr>
       </p:pic>
-      <mc:AlternateContent xmlns:mc="http://schemas.openxmlformats.org/markup-compatibility/2006">
-        <mc:Choice xmlns:a14="http://schemas.microsoft.com/office/drawing/2010/main" Requires="a14">
+      <mc:AlternateContent xmlns:mc="http://schemas.openxmlformats.org/markup-compatibility/2006" xmlns:a14="http://schemas.microsoft.com/office/drawing/2010/main">
+        <mc:Choice Requires="a14">
           <p:sp>
             <p:nvSpPr>
               <p:cNvPr id="7" name="TextBox 6">
@@ -5302,6 +5302,7 @@
                 </a:endParaRPr>
               </a:p>
               <a:p>
+                <a:pPr/>
                 <a14:m>
                   <m:oMathPara xmlns:m="http://schemas.openxmlformats.org/officeDocument/2006/math">
                     <m:oMath>
@@ -5349,7 +5350,7 @@
             </p:txBody>
           </p:sp>
         </mc:Choice>
-        <mc:Fallback>
+        <mc:Fallback xmlns="">
           <p:sp>
             <p:nvSpPr>
               <p:cNvPr id="7" name="TextBox 6">
@@ -5394,8 +5395,8 @@
           </p:sp>
         </mc:Fallback>
       </mc:AlternateContent>
-      <mc:AlternateContent xmlns:mc="http://schemas.openxmlformats.org/markup-compatibility/2006">
-        <mc:Choice xmlns:a14="http://schemas.microsoft.com/office/drawing/2010/main" Requires="a14">
+      <mc:AlternateContent xmlns:mc="http://schemas.openxmlformats.org/markup-compatibility/2006" xmlns:a14="http://schemas.microsoft.com/office/drawing/2010/main">
+        <mc:Choice Requires="a14">
           <p:sp>
             <p:nvSpPr>
               <p:cNvPr id="8" name="TextBox 7">
@@ -5435,6 +5436,7 @@
                 </a:endParaRPr>
               </a:p>
               <a:p>
+                <a:pPr/>
                 <a14:m>
                   <m:oMathPara xmlns:m="http://schemas.openxmlformats.org/officeDocument/2006/math">
                     <m:oMath>
@@ -5482,7 +5484,7 @@
             </p:txBody>
           </p:sp>
         </mc:Choice>
-        <mc:Fallback>
+        <mc:Fallback xmlns="">
           <p:sp>
             <p:nvSpPr>
               <p:cNvPr id="8" name="TextBox 7">
@@ -5589,8 +5591,8 @@
           </a:p>
         </p:txBody>
       </p:sp>
-      <mc:AlternateContent xmlns:mc="http://schemas.openxmlformats.org/markup-compatibility/2006">
-        <mc:Choice xmlns:a14="http://schemas.microsoft.com/office/drawing/2010/main" Requires="a14">
+      <mc:AlternateContent xmlns:mc="http://schemas.openxmlformats.org/markup-compatibility/2006" xmlns:a14="http://schemas.microsoft.com/office/drawing/2010/main">
+        <mc:Choice Requires="a14">
           <p:sp>
             <p:nvSpPr>
               <p:cNvPr id="3" name="내용 개체 틀 2">
@@ -5785,13 +5787,7 @@
                       <a:rPr lang="en-US" altLang="ko-KR" i="1" dirty="0">
                         <a:latin typeface="Cambria Math" panose="02040503050406030204" pitchFamily="18" charset="0"/>
                       </a:rPr>
-                      <m:t>’</m:t>
-                    </m:r>
-                    <m:r>
-                      <a:rPr lang="en-US" altLang="ko-KR" i="1" dirty="0">
-                        <a:latin typeface="Cambria Math" panose="02040503050406030204" pitchFamily="18" charset="0"/>
-                      </a:rPr>
-                      <m:t>)</m:t>
+                      <m:t>’)</m:t>
                     </m:r>
                   </m:oMath>
                 </a14:m>
@@ -5863,7 +5859,7 @@
             </p:txBody>
           </p:sp>
         </mc:Choice>
-        <mc:Fallback>
+        <mc:Fallback xmlns="">
           <p:sp>
             <p:nvSpPr>
               <p:cNvPr id="3" name="내용 개체 틀 2">
@@ -6387,7 +6383,21 @@
                 </a14:m>
                 <a:r>
                   <a:rPr lang="ko-KR" altLang="en-US" sz="2400" dirty="0"/>
-                  <a:t>이고 에이전트가 정책 에 따라 행동 </a:t>
+                  <a:t>이고 에이전트가 정책 </a:t>
+                </a:r>
+                <a14:m>
+                  <m:oMath xmlns:m="http://schemas.openxmlformats.org/officeDocument/2006/math">
+                    <m:r>
+                      <a:rPr lang="ko-KR" altLang="en-US" sz="2400" i="1">
+                        <a:latin typeface="Cambria Math" panose="02040503050406030204" pitchFamily="18" charset="0"/>
+                      </a:rPr>
+                      <m:t>𝜋</m:t>
+                    </m:r>
+                  </m:oMath>
+                </a14:m>
+                <a:r>
+                  <a:rPr lang="ko-KR" altLang="en-US" sz="2400" dirty="0"/>
+                  <a:t>에 따라 행동 </a:t>
                 </a:r>
                 <a14:m>
                   <m:oMath xmlns:m="http://schemas.openxmlformats.org/officeDocument/2006/math">
@@ -6721,8 +6731,8 @@
           </a:prstGeom>
         </p:spPr>
       </p:pic>
-      <mc:AlternateContent xmlns:mc="http://schemas.openxmlformats.org/markup-compatibility/2006">
-        <mc:Choice xmlns:a14="http://schemas.microsoft.com/office/drawing/2010/main" Requires="a14">
+      <mc:AlternateContent xmlns:mc="http://schemas.openxmlformats.org/markup-compatibility/2006" xmlns:a14="http://schemas.microsoft.com/office/drawing/2010/main">
+        <mc:Choice Requires="a14">
           <p:sp>
             <p:nvSpPr>
               <p:cNvPr id="9" name="TextBox 8">
@@ -6751,6 +6761,7 @@
               </a:bodyPr>
               <a:lstStyle/>
               <a:p>
+                <a:pPr/>
                 <a14:m>
                   <m:oMathPara xmlns:m="http://schemas.openxmlformats.org/officeDocument/2006/math">
                     <m:oMath>
@@ -6932,7 +6943,7 @@
             </p:txBody>
           </p:sp>
         </mc:Choice>
-        <mc:Fallback>
+        <mc:Fallback xmlns="">
           <p:sp>
             <p:nvSpPr>
               <p:cNvPr id="9" name="TextBox 8">
@@ -7072,7 +7083,7 @@
                 </a:pPr>
                 <a:r>
                   <a:rPr lang="ko-KR" altLang="en-US" dirty="0"/>
-                  <a:t>에이전트와 환경이 확률적으로 동장하기 때문에</a:t>
+                  <a:t>에이전트와 환경이 확률적으로 동작하기 때문에</a:t>
                 </a:r>
                 <a:r>
                   <a:rPr lang="en-US" altLang="ko-KR" dirty="0"/>
@@ -7277,8 +7288,8 @@
             </p:nvSpPr>
             <p:spPr>
               <a:xfrm>
-                <a:off x="3209193" y="3955610"/>
-                <a:ext cx="2424382" cy="369332"/>
+                <a:off x="2739286" y="4033248"/>
+                <a:ext cx="3665427" cy="523220"/>
               </a:xfrm>
               <a:prstGeom prst="rect">
                 <a:avLst/>
@@ -7291,20 +7302,21 @@
               </a:bodyPr>
               <a:lstStyle/>
               <a:p>
+                <a:pPr/>
                 <a14:m>
                   <m:oMathPara xmlns:m="http://schemas.openxmlformats.org/officeDocument/2006/math">
                     <m:oMath>
                       <m:sSub>
                         <m:sSubPr>
                           <m:ctrlPr>
-                            <a:rPr lang="en-US" altLang="ko-KR" i="1">
+                            <a:rPr lang="en-US" altLang="ko-KR" sz="2800" i="1">
                               <a:latin typeface="Cambria Math" panose="02040503050406030204" pitchFamily="18" charset="0"/>
                             </a:rPr>
                           </m:ctrlPr>
                         </m:sSubPr>
                         <m:e>
                           <m:r>
-                            <a:rPr lang="en-US" altLang="ko-KR" i="1">
+                            <a:rPr lang="en-US" altLang="ko-KR" sz="2800" i="1">
                               <a:latin typeface="Cambria Math" panose="02040503050406030204" pitchFamily="18" charset="0"/>
                             </a:rPr>
                             <m:t>𝑣</m:t>
@@ -7312,7 +7324,7 @@
                         </m:e>
                         <m:sub>
                           <m:r>
-                            <a:rPr lang="en-US" altLang="ko-KR" i="1">
+                            <a:rPr lang="en-US" altLang="ko-KR" sz="2800" i="1">
                               <a:latin typeface="Cambria Math" panose="02040503050406030204" pitchFamily="18" charset="0"/>
                             </a:rPr>
                             <m:t>𝜋</m:t>
@@ -7322,14 +7334,14 @@
                       <m:d>
                         <m:dPr>
                           <m:ctrlPr>
-                            <a:rPr lang="en-US" altLang="ko-KR" i="1">
+                            <a:rPr lang="en-US" altLang="ko-KR" sz="2800" i="1">
                               <a:latin typeface="Cambria Math" panose="02040503050406030204" pitchFamily="18" charset="0"/>
                             </a:rPr>
                           </m:ctrlPr>
                         </m:dPr>
                         <m:e>
                           <m:r>
-                            <a:rPr lang="en-US" altLang="ko-KR" i="1">
+                            <a:rPr lang="en-US" altLang="ko-KR" sz="2800" i="1">
                               <a:latin typeface="Cambria Math" panose="02040503050406030204" pitchFamily="18" charset="0"/>
                             </a:rPr>
                             <m:t>𝑠</m:t>
@@ -7337,7 +7349,7 @@
                         </m:e>
                       </m:d>
                       <m:r>
-                        <a:rPr lang="en-US" altLang="ko-KR" i="0">
+                        <a:rPr lang="en-US" altLang="ko-KR" sz="2800" i="0">
                           <a:latin typeface="Cambria Math" panose="02040503050406030204" pitchFamily="18" charset="0"/>
                         </a:rPr>
                         <m:t>=</m:t>
@@ -7345,14 +7357,14 @@
                       <m:sSub>
                         <m:sSubPr>
                           <m:ctrlPr>
-                            <a:rPr lang="ko-KR" altLang="en-US" i="1">
+                            <a:rPr lang="ko-KR" altLang="en-US" sz="2800" i="1">
                               <a:latin typeface="Cambria Math" panose="02040503050406030204" pitchFamily="18" charset="0"/>
                             </a:rPr>
                           </m:ctrlPr>
                         </m:sSubPr>
                         <m:e>
                           <m:r>
-                            <a:rPr lang="ko-KR" altLang="en-US" i="1">
+                            <a:rPr lang="ko-KR" altLang="en-US" sz="2800" i="1">
                               <a:latin typeface="Cambria Math" panose="02040503050406030204" pitchFamily="18" charset="0"/>
                             </a:rPr>
                             <m:t>𝔼</m:t>
@@ -7360,7 +7372,7 @@
                         </m:e>
                         <m:sub>
                           <m:r>
-                            <a:rPr lang="ko-KR" altLang="en-US" i="1" smtClean="0">
+                            <a:rPr lang="ko-KR" altLang="en-US" sz="2800" i="1" smtClean="0">
                               <a:latin typeface="Cambria Math" panose="02040503050406030204" pitchFamily="18" charset="0"/>
                             </a:rPr>
                             <m:t>𝜋</m:t>
@@ -7372,7 +7384,7 @@
                           <m:begChr m:val="["/>
                           <m:endChr m:val="]"/>
                           <m:ctrlPr>
-                            <a:rPr lang="en-US" altLang="ko-KR" i="1">
+                            <a:rPr lang="en-US" altLang="ko-KR" sz="2800" i="1">
                               <a:latin typeface="Cambria Math" panose="02040503050406030204" pitchFamily="18" charset="0"/>
                             </a:rPr>
                           </m:ctrlPr>
@@ -7381,14 +7393,14 @@
                           <m:sSub>
                             <m:sSubPr>
                               <m:ctrlPr>
-                                <a:rPr lang="en-US" altLang="ko-KR" i="1">
+                                <a:rPr lang="en-US" altLang="ko-KR" sz="2800" i="1">
                                   <a:latin typeface="Cambria Math" panose="02040503050406030204" pitchFamily="18" charset="0"/>
                                 </a:rPr>
                               </m:ctrlPr>
                             </m:sSubPr>
                             <m:e>
                               <m:r>
-                                <a:rPr lang="en-US" altLang="ko-KR" i="1">
+                                <a:rPr lang="en-US" altLang="ko-KR" sz="2800" i="1">
                                   <a:latin typeface="Cambria Math" panose="02040503050406030204" pitchFamily="18" charset="0"/>
                                 </a:rPr>
                                 <m:t>𝐺</m:t>
@@ -7396,7 +7408,7 @@
                             </m:e>
                             <m:sub>
                               <m:r>
-                                <a:rPr lang="en-US" altLang="ko-KR" i="1">
+                                <a:rPr lang="en-US" altLang="ko-KR" sz="2800" i="1">
                                   <a:latin typeface="Cambria Math" panose="02040503050406030204" pitchFamily="18" charset="0"/>
                                 </a:rPr>
                                 <m:t>𝑡</m:t>
@@ -7404,7 +7416,7 @@
                             </m:sub>
                           </m:sSub>
                           <m:r>
-                            <a:rPr lang="en-US" altLang="ko-KR" i="0">
+                            <a:rPr lang="en-US" altLang="ko-KR" sz="2800" i="0">
                               <a:latin typeface="Cambria Math" panose="02040503050406030204" pitchFamily="18" charset="0"/>
                             </a:rPr>
                             <m:t>|</m:t>
@@ -7412,14 +7424,14 @@
                           <m:sSub>
                             <m:sSubPr>
                               <m:ctrlPr>
-                                <a:rPr lang="en-US" altLang="ko-KR" i="1">
+                                <a:rPr lang="en-US" altLang="ko-KR" sz="2800" i="1">
                                   <a:latin typeface="Cambria Math" panose="02040503050406030204" pitchFamily="18" charset="0"/>
                                 </a:rPr>
                               </m:ctrlPr>
                             </m:sSubPr>
                             <m:e>
                               <m:r>
-                                <a:rPr lang="en-US" altLang="ko-KR" i="1">
+                                <a:rPr lang="en-US" altLang="ko-KR" sz="2800" i="1">
                                   <a:latin typeface="Cambria Math" panose="02040503050406030204" pitchFamily="18" charset="0"/>
                                 </a:rPr>
                                 <m:t>𝑆</m:t>
@@ -7427,7 +7439,7 @@
                             </m:e>
                             <m:sub>
                               <m:r>
-                                <a:rPr lang="en-US" altLang="ko-KR" i="1">
+                                <a:rPr lang="en-US" altLang="ko-KR" sz="2800" i="1">
                                   <a:latin typeface="Cambria Math" panose="02040503050406030204" pitchFamily="18" charset="0"/>
                                 </a:rPr>
                                 <m:t>𝑡</m:t>
@@ -7435,13 +7447,13 @@
                             </m:sub>
                           </m:sSub>
                           <m:r>
-                            <a:rPr lang="en-US" altLang="ko-KR" i="0">
+                            <a:rPr lang="en-US" altLang="ko-KR" sz="2800" i="0">
                               <a:latin typeface="Cambria Math" panose="02040503050406030204" pitchFamily="18" charset="0"/>
                             </a:rPr>
                             <m:t>=</m:t>
                           </m:r>
                           <m:r>
-                            <a:rPr lang="en-US" altLang="ko-KR" i="1">
+                            <a:rPr lang="en-US" altLang="ko-KR" sz="2800" i="1">
                               <a:latin typeface="Cambria Math" panose="02040503050406030204" pitchFamily="18" charset="0"/>
                             </a:rPr>
                             <m:t>𝑠</m:t>
@@ -7451,7 +7463,7 @@
                     </m:oMath>
                   </m:oMathPara>
                 </a14:m>
-                <a:endParaRPr lang="ko-KR" altLang="en-US" dirty="0"/>
+                <a:endParaRPr lang="ko-KR" altLang="en-US" sz="2800" dirty="0"/>
               </a:p>
             </p:txBody>
           </p:sp>
@@ -7473,8 +7485,8 @@
             </p:nvSpPr>
             <p:spPr>
               <a:xfrm>
-                <a:off x="3209193" y="3955610"/>
-                <a:ext cx="2424382" cy="369332"/>
+                <a:off x="2739286" y="4033248"/>
+                <a:ext cx="3665427" cy="523220"/>
               </a:xfrm>
               <a:prstGeom prst="rect">
                 <a:avLst/>
@@ -7482,7 +7494,7 @@
               <a:blipFill>
                 <a:blip r:embed="rId3"/>
                 <a:stretch>
-                  <a:fillRect b="-13333"/>
+                  <a:fillRect/>
                 </a:stretch>
               </a:blipFill>
             </p:spPr>
@@ -7559,8 +7571,8 @@
           </a:p>
         </p:txBody>
       </p:sp>
-      <mc:AlternateContent xmlns:mc="http://schemas.openxmlformats.org/markup-compatibility/2006">
-        <mc:Choice xmlns:a14="http://schemas.microsoft.com/office/drawing/2010/main" Requires="a14">
+      <mc:AlternateContent xmlns:mc="http://schemas.openxmlformats.org/markup-compatibility/2006" xmlns:a14="http://schemas.microsoft.com/office/drawing/2010/main">
+        <mc:Choice Requires="a14">
           <p:sp>
             <p:nvSpPr>
               <p:cNvPr id="3" name="내용 개체 틀 2">
@@ -7630,7 +7642,7 @@
                           <a:rPr lang="en-US" altLang="ko-KR" sz="2400" b="0" i="1" dirty="0" smtClean="0">
                             <a:latin typeface="Cambria Math" panose="02040503050406030204" pitchFamily="18" charset="0"/>
                           </a:rPr>
-                          <m:t>'</m:t>
+                          <m:t>′</m:t>
                         </m:r>
                       </m:sup>
                     </m:sSup>
@@ -7736,7 +7748,7 @@
                               <a:rPr lang="en-US" altLang="ko-KR" sz="2400" b="0" i="1" smtClean="0">
                                 <a:latin typeface="Cambria Math" panose="02040503050406030204" pitchFamily="18" charset="0"/>
                               </a:rPr>
-                              <m:t>'</m:t>
+                              <m:t>′</m:t>
                             </m:r>
                           </m:sup>
                         </m:sSup>
@@ -7840,7 +7852,7 @@
                           <a:rPr lang="en-US" altLang="ko-KR" sz="2400" b="0" i="1" smtClean="0">
                             <a:latin typeface="Cambria Math" panose="02040503050406030204" pitchFamily="18" charset="0"/>
                           </a:rPr>
-                          <m:t>*</m:t>
+                          <m:t>∗</m:t>
                         </m:r>
                       </m:sub>
                     </m:sSub>
@@ -7890,7 +7902,7 @@
                               <a:rPr lang="en-US" altLang="ko-KR" sz="2400" b="0" i="1" smtClean="0">
                                 <a:latin typeface="Cambria Math" panose="02040503050406030204" pitchFamily="18" charset="0"/>
                               </a:rPr>
-                              <m:t>*</m:t>
+                              <m:t>∗</m:t>
                             </m:r>
                           </m:sub>
                         </m:sSub>
@@ -7949,7 +7961,7 @@
             </p:txBody>
           </p:sp>
         </mc:Choice>
-        <mc:Fallback>
+        <mc:Fallback xmlns="">
           <p:sp>
             <p:nvSpPr>
               <p:cNvPr id="3" name="내용 개체 틀 2">
@@ -8160,8 +8172,8 @@
           </a:p>
         </p:txBody>
       </p:sp>
-      <mc:AlternateContent xmlns:mc="http://schemas.openxmlformats.org/markup-compatibility/2006">
-        <mc:Choice xmlns:a14="http://schemas.microsoft.com/office/drawing/2010/main" Requires="a14">
+      <mc:AlternateContent xmlns:mc="http://schemas.openxmlformats.org/markup-compatibility/2006" xmlns:a14="http://schemas.microsoft.com/office/drawing/2010/main">
+        <mc:Choice Requires="a14">
           <p:sp>
             <p:nvSpPr>
               <p:cNvPr id="3" name="내용 개체 틀 2">
@@ -8261,24 +8273,32 @@
                     <m:sSup>
                       <m:sSupPr>
                         <m:ctrlPr>
-                          <a:rPr lang="ko-KR" altLang="en-US"/>
+                          <a:rPr lang="ko-KR" altLang="en-US">
+                            <a:latin typeface="Cambria Math" panose="02040503050406030204" pitchFamily="18" charset="0"/>
+                          </a:rPr>
                         </m:ctrlPr>
                       </m:sSupPr>
                       <m:e>
                         <m:r>
-                          <a:rPr lang="ko-KR" altLang="en-US"/>
+                          <a:rPr lang="ko-KR" altLang="en-US">
+                            <a:latin typeface="Cambria Math" panose="02040503050406030204" pitchFamily="18" charset="0"/>
+                          </a:rPr>
                           <m:t>2</m:t>
                         </m:r>
                       </m:e>
                       <m:sup>
                         <m:r>
-                          <a:rPr lang="ko-KR" altLang="en-US"/>
+                          <a:rPr lang="ko-KR" altLang="en-US">
+                            <a:latin typeface="Cambria Math" panose="02040503050406030204" pitchFamily="18" charset="0"/>
+                          </a:rPr>
                           <m:t>10</m:t>
                         </m:r>
                       </m:sup>
                     </m:sSup>
                     <m:r>
-                      <a:rPr lang="ko-KR" altLang="en-US"/>
+                      <a:rPr lang="ko-KR" altLang="en-US">
+                        <a:latin typeface="Cambria Math" panose="02040503050406030204" pitchFamily="18" charset="0"/>
+                      </a:rPr>
                       <m:t>=1024</m:t>
                     </m:r>
                   </m:oMath>
@@ -8778,7 +8798,7 @@
             </p:txBody>
           </p:sp>
         </mc:Choice>
-        <mc:Fallback>
+        <mc:Fallback xmlns="">
           <p:sp>
             <p:nvSpPr>
               <p:cNvPr id="3" name="내용 개체 틀 2">
@@ -9020,15 +9040,15 @@
             </a:r>
             <a:r>
               <a:rPr lang="ko-KR" altLang="en-US" dirty="0"/>
-              <a:t>으로 이동하면 사과가 </a:t>
-            </a:r>
-            <a:r>
-              <a:rPr lang="ko-KR" altLang="en-US" dirty="0" err="1"/>
-              <a:t>다싱</a:t>
+              <a:t>으로 이동하면 </a:t>
+            </a:r>
+            <a:r>
+              <a:rPr lang="ko-KR" altLang="en-US"/>
+              <a:t>사과가 다시 </a:t>
             </a:r>
             <a:r>
               <a:rPr lang="ko-KR" altLang="en-US" dirty="0"/>
-              <a:t> 생성</a:t>
+              <a:t>생성</a:t>
             </a:r>
             <a:endParaRPr lang="en-US" altLang="ko-KR" dirty="0"/>
           </a:p>
@@ -9693,8 +9713,8 @@
           </a:p>
         </p:txBody>
       </p:sp>
-      <mc:AlternateContent xmlns:mc="http://schemas.openxmlformats.org/markup-compatibility/2006">
-        <mc:Choice xmlns:a14="http://schemas.microsoft.com/office/drawing/2010/main" Requires="a14">
+      <mc:AlternateContent xmlns:mc="http://schemas.openxmlformats.org/markup-compatibility/2006" xmlns:a14="http://schemas.microsoft.com/office/drawing/2010/main">
+        <mc:Choice Requires="a14">
           <p:sp>
             <p:nvSpPr>
               <p:cNvPr id="3" name="내용 개체 틀 2">
@@ -9785,7 +9805,7 @@
             </p:txBody>
           </p:sp>
         </mc:Choice>
-        <mc:Fallback>
+        <mc:Fallback xmlns="">
           <p:sp>
             <p:nvSpPr>
               <p:cNvPr id="3" name="내용 개체 틀 2">
@@ -9984,8 +10004,8 @@
           </a:p>
         </p:txBody>
       </p:sp>
-      <mc:AlternateContent xmlns:mc="http://schemas.openxmlformats.org/markup-compatibility/2006">
-        <mc:Choice xmlns:a14="http://schemas.microsoft.com/office/drawing/2010/main" Requires="a14">
+      <mc:AlternateContent xmlns:mc="http://schemas.openxmlformats.org/markup-compatibility/2006" xmlns:a14="http://schemas.microsoft.com/office/drawing/2010/main">
+        <mc:Choice Requires="a14">
           <p:sp>
             <p:nvSpPr>
               <p:cNvPr id="3" name="내용 개체 틀 2">
@@ -10173,7 +10193,7 @@
             </p:txBody>
           </p:sp>
         </mc:Choice>
-        <mc:Fallback>
+        <mc:Fallback xmlns="">
           <p:sp>
             <p:nvSpPr>
               <p:cNvPr id="3" name="내용 개체 틀 2">
@@ -10242,8 +10262,8 @@
           </a:p>
         </p:txBody>
       </p:sp>
-      <mc:AlternateContent xmlns:mc="http://schemas.openxmlformats.org/markup-compatibility/2006">
-        <mc:Choice xmlns:a14="http://schemas.microsoft.com/office/drawing/2010/main" Requires="a14">
+      <mc:AlternateContent xmlns:mc="http://schemas.openxmlformats.org/markup-compatibility/2006" xmlns:a14="http://schemas.microsoft.com/office/drawing/2010/main">
+        <mc:Choice Requires="a14">
           <p:sp>
             <p:nvSpPr>
               <p:cNvPr id="6" name="TextBox 5">
@@ -10577,7 +10597,7 @@
             </p:txBody>
           </p:sp>
         </mc:Choice>
-        <mc:Fallback>
+        <mc:Fallback xmlns="">
           <p:sp>
             <p:nvSpPr>
               <p:cNvPr id="6" name="TextBox 5">
@@ -10733,8 +10753,8 @@
           </a:prstGeom>
         </p:spPr>
       </p:pic>
-      <mc:AlternateContent xmlns:mc="http://schemas.openxmlformats.org/markup-compatibility/2006">
-        <mc:Choice xmlns:a14="http://schemas.microsoft.com/office/drawing/2010/main" Requires="a14">
+      <mc:AlternateContent xmlns:mc="http://schemas.openxmlformats.org/markup-compatibility/2006" xmlns:a14="http://schemas.microsoft.com/office/drawing/2010/main">
+        <mc:Choice Requires="a14">
           <p:sp>
             <p:nvSpPr>
               <p:cNvPr id="13" name="TextBox 12">
@@ -10818,6 +10838,7 @@
                 </a:endParaRPr>
               </a:p>
               <a:p>
+                <a:pPr/>
                 <a14:m>
                   <m:oMathPara xmlns:m="http://schemas.openxmlformats.org/officeDocument/2006/math">
                     <m:oMath>
@@ -10909,7 +10930,7 @@
             </p:txBody>
           </p:sp>
         </mc:Choice>
-        <mc:Fallback>
+        <mc:Fallback xmlns="">
           <p:sp>
             <p:nvSpPr>
               <p:cNvPr id="13" name="TextBox 12">
@@ -10954,8 +10975,8 @@
           </p:sp>
         </mc:Fallback>
       </mc:AlternateContent>
-      <mc:AlternateContent xmlns:mc="http://schemas.openxmlformats.org/markup-compatibility/2006">
-        <mc:Choice xmlns:a14="http://schemas.microsoft.com/office/drawing/2010/main" Requires="a14">
+      <mc:AlternateContent xmlns:mc="http://schemas.openxmlformats.org/markup-compatibility/2006" xmlns:a14="http://schemas.microsoft.com/office/drawing/2010/main">
+        <mc:Choice Requires="a14">
           <p:sp>
             <p:nvSpPr>
               <p:cNvPr id="15" name="TextBox 14">
@@ -11080,16 +11101,7 @@
                           </a:solidFill>
                           <a:latin typeface="Cambria Math" panose="02040503050406030204" pitchFamily="18" charset="0"/>
                         </a:rPr>
-                        <m:t>−</m:t>
-                      </m:r>
-                      <m:r>
-                        <a:rPr lang="en-US" altLang="ko-KR" sz="1600" b="0" i="1" smtClean="0">
-                          <a:solidFill>
-                            <a:srgbClr val="FF0000"/>
-                          </a:solidFill>
-                          <a:latin typeface="Cambria Math" panose="02040503050406030204" pitchFamily="18" charset="0"/>
-                        </a:rPr>
-                        <m:t>1</m:t>
+                        <m:t>−1</m:t>
                       </m:r>
                       <m:r>
                         <a:rPr lang="en-US" altLang="ko-KR" sz="1600" i="0">
@@ -11205,17 +11217,7 @@
                           <a:latin typeface="Cambria Math" panose="02040503050406030204" pitchFamily="18" charset="0"/>
                           <a:ea typeface="Cambria Math" panose="02040503050406030204" pitchFamily="18" charset="0"/>
                         </a:rPr>
-                        <m:t>−</m:t>
-                      </m:r>
-                      <m:r>
-                        <a:rPr lang="en-US" altLang="ko-KR" sz="1600" b="0" i="1" smtClean="0">
-                          <a:solidFill>
-                            <a:srgbClr val="FF0000"/>
-                          </a:solidFill>
-                          <a:latin typeface="Cambria Math" panose="02040503050406030204" pitchFamily="18" charset="0"/>
-                          <a:ea typeface="Cambria Math" panose="02040503050406030204" pitchFamily="18" charset="0"/>
-                        </a:rPr>
-                        <m:t>1</m:t>
+                        <m:t>−1</m:t>
                       </m:r>
                       <m:r>
                         <a:rPr lang="en-US" altLang="ko-KR" sz="1600" b="0" i="1" smtClean="0">
@@ -11293,17 +11295,7 @@
                           <a:latin typeface="Cambria Math" panose="02040503050406030204" pitchFamily="18" charset="0"/>
                           <a:ea typeface="Cambria Math" panose="02040503050406030204" pitchFamily="18" charset="0"/>
                         </a:rPr>
-                        <m:t>−</m:t>
-                      </m:r>
-                      <m:r>
-                        <a:rPr lang="en-US" altLang="ko-KR" sz="1600" b="0" i="1" smtClean="0">
-                          <a:solidFill>
-                            <a:srgbClr val="FF0000"/>
-                          </a:solidFill>
-                          <a:latin typeface="Cambria Math" panose="02040503050406030204" pitchFamily="18" charset="0"/>
-                          <a:ea typeface="Cambria Math" panose="02040503050406030204" pitchFamily="18" charset="0"/>
-                        </a:rPr>
-                        <m:t>1</m:t>
+                        <m:t>−1</m:t>
                       </m:r>
                       <m:r>
                         <a:rPr lang="en-US" altLang="ko-KR" sz="1600" b="0" i="1" smtClean="0">
@@ -11345,14 +11337,7 @@
                           <a:latin typeface="Cambria Math" panose="02040503050406030204" pitchFamily="18" charset="0"/>
                           <a:ea typeface="Cambria Math" panose="02040503050406030204" pitchFamily="18" charset="0"/>
                         </a:rPr>
-                        <m:t>=−</m:t>
-                      </m:r>
-                      <m:r>
-                        <a:rPr lang="en-US" altLang="ko-KR" sz="1600" b="0" i="1" smtClean="0">
-                          <a:latin typeface="Cambria Math" panose="02040503050406030204" pitchFamily="18" charset="0"/>
-                          <a:ea typeface="Cambria Math" panose="02040503050406030204" pitchFamily="18" charset="0"/>
-                        </a:rPr>
-                        <m:t>10</m:t>
+                        <m:t>=−10</m:t>
                       </m:r>
                     </m:oMath>
                   </m:oMathPara>
@@ -11362,7 +11347,7 @@
             </p:txBody>
           </p:sp>
         </mc:Choice>
-        <mc:Fallback>
+        <mc:Fallback xmlns="">
           <p:sp>
             <p:nvSpPr>
               <p:cNvPr id="15" name="TextBox 14">
@@ -11937,8 +11922,8 @@
           </a:prstGeom>
         </p:spPr>
       </p:pic>
-      <mc:AlternateContent xmlns:mc="http://schemas.openxmlformats.org/markup-compatibility/2006">
-        <mc:Choice xmlns:a14="http://schemas.microsoft.com/office/drawing/2010/main" Requires="a14">
+      <mc:AlternateContent xmlns:mc="http://schemas.openxmlformats.org/markup-compatibility/2006" xmlns:a14="http://schemas.microsoft.com/office/drawing/2010/main">
+        <mc:Choice Requires="a14">
           <p:sp>
             <p:nvSpPr>
               <p:cNvPr id="10" name="TextBox 9">
@@ -12258,7 +12243,7 @@
             </p:txBody>
           </p:sp>
         </mc:Choice>
-        <mc:Fallback>
+        <mc:Fallback xmlns="">
           <p:sp>
             <p:nvSpPr>
               <p:cNvPr id="10" name="TextBox 9">
@@ -12693,8 +12678,8 @@
           </a:p>
         </p:txBody>
       </p:sp>
-      <mc:AlternateContent xmlns:mc="http://schemas.openxmlformats.org/markup-compatibility/2006">
-        <mc:Choice xmlns:a14="http://schemas.microsoft.com/office/drawing/2010/main" Requires="a14">
+      <mc:AlternateContent xmlns:mc="http://schemas.openxmlformats.org/markup-compatibility/2006" xmlns:a14="http://schemas.microsoft.com/office/drawing/2010/main">
+        <mc:Choice Requires="a14">
           <p:sp>
             <p:nvSpPr>
               <p:cNvPr id="6" name="TextBox 5">
@@ -12783,7 +12768,7 @@
             </p:txBody>
           </p:sp>
         </mc:Choice>
-        <mc:Fallback>
+        <mc:Fallback xmlns="">
           <p:sp>
             <p:nvSpPr>
               <p:cNvPr id="6" name="TextBox 5">
@@ -12828,8 +12813,8 @@
           </p:sp>
         </mc:Fallback>
       </mc:AlternateContent>
-      <mc:AlternateContent xmlns:mc="http://schemas.openxmlformats.org/markup-compatibility/2006">
-        <mc:Choice xmlns:a14="http://schemas.microsoft.com/office/drawing/2010/main" Requires="a14">
+      <mc:AlternateContent xmlns:mc="http://schemas.openxmlformats.org/markup-compatibility/2006" xmlns:a14="http://schemas.microsoft.com/office/drawing/2010/main">
+        <mc:Choice Requires="a14">
           <p:sp>
             <p:nvSpPr>
               <p:cNvPr id="8" name="TextBox 7">
@@ -12922,7 +12907,7 @@
             </p:txBody>
           </p:sp>
         </mc:Choice>
-        <mc:Fallback>
+        <mc:Fallback xmlns="">
           <p:sp>
             <p:nvSpPr>
               <p:cNvPr id="8" name="TextBox 7">
@@ -13061,8 +13046,8 @@
           </a:p>
         </p:txBody>
       </p:sp>
-      <mc:AlternateContent xmlns:mc="http://schemas.openxmlformats.org/markup-compatibility/2006">
-        <mc:Choice xmlns:a14="http://schemas.microsoft.com/office/drawing/2010/main" Requires="a14">
+      <mc:AlternateContent xmlns:mc="http://schemas.openxmlformats.org/markup-compatibility/2006" xmlns:a14="http://schemas.microsoft.com/office/drawing/2010/main">
+        <mc:Choice Requires="a14">
           <p:sp>
             <p:nvSpPr>
               <p:cNvPr id="3" name="내용 개체 틀 2">
@@ -13277,7 +13262,7 @@
             </p:txBody>
           </p:sp>
         </mc:Choice>
-        <mc:Fallback>
+        <mc:Fallback xmlns="">
           <p:sp>
             <p:nvSpPr>
               <p:cNvPr id="3" name="내용 개체 틀 2">
@@ -13449,8 +13434,8 @@
           </a:p>
         </p:txBody>
       </p:sp>
-      <mc:AlternateContent xmlns:mc="http://schemas.openxmlformats.org/markup-compatibility/2006">
-        <mc:Choice xmlns:a14="http://schemas.microsoft.com/office/drawing/2010/main" Requires="a14">
+      <mc:AlternateContent xmlns:mc="http://schemas.openxmlformats.org/markup-compatibility/2006" xmlns:a14="http://schemas.microsoft.com/office/drawing/2010/main">
+        <mc:Choice Requires="a14">
           <p:sp>
             <p:nvSpPr>
               <p:cNvPr id="3" name="내용 개체 틀 2">
@@ -13678,7 +13663,7 @@
             </p:txBody>
           </p:sp>
         </mc:Choice>
-        <mc:Fallback>
+        <mc:Fallback xmlns="">
           <p:sp>
             <p:nvSpPr>
               <p:cNvPr id="3" name="내용 개체 틀 2">
